--- a/docs/design/presentation/MyCloudSync_design.pptx
+++ b/docs/design/presentation/MyCloudSync_design.pptx
@@ -800,7 +800,7 @@
           <a:lstStyle xmlns:a="http://schemas.openxmlformats.org/drawingml/2006/main"/>
           <a:p xmlns:a="http://schemas.openxmlformats.org/drawingml/2006/main">
             <a:r>
-              <a:t>Склад таблиць узято з README проєкту. Атрибути уточнені для зв’язків між локальним шляхом і Google Drive ID; потрібно узгодити типи, індекси й точне правило визначення версій.</a:t>
+              <a:t>Спрощена модель. Повний опис полів, типів, індексів і SQL-скрипт — у docs/architecture/data-model.md та schema.sql.</a:t>
             </a:r>
           </a:p>
         </p:txBody>
@@ -1010,7 +1010,7 @@
           <a:lstStyle xmlns:a="http://schemas.openxmlformats.org/drawingml/2006/main"/>
           <a:p xmlns:a="http://schemas.openxmlformats.org/drawingml/2006/main">
             <a:r>
-              <a:t>Рядки журналу є демонстраційними. Стовпці відповідають FR-13; помилки виділені кольором і текстом, щоб статус залишався зрозумілим без залежності лише від кольору.</a:t>
+              <a:t>Стовпці відповідають FR-13; помилки виділені кольором і текстом, щоб статус залишався зрозумілим без залежності лише від кольору.</a:t>
             </a:r>
           </a:p>
         </p:txBody>
@@ -3304,7 +3304,7 @@
                 <a:ea typeface="Arial"/>
                 <a:cs typeface="Arial"/>
               </a:rPr>
-              <a:t>Повне відстеження видалень і періодичний запуск треба окремо підтвердити в межах MVP.</a:t>
+              <a:t>Видалення синхронізуються через кошик, зміни в хмарі перевіряються за таймером.</a:t>
             </a:r>
           </a:p>
         </p:txBody>
@@ -5470,7 +5470,7 @@
                 <a:ea typeface="Arial"/>
                 <a:cs typeface="Arial"/>
               </a:rPr>
-              <a:t>Sync Coordinator</a:t>
+              <a:t>SyncCoordinator</a:t>
             </a:r>
           </a:p>
         </p:txBody>
@@ -5667,7 +5667,7 @@
                 <a:ea typeface="Arial"/>
                 <a:cs typeface="Arial"/>
               </a:rPr>
-              <a:t>Change Detector</a:t>
+              <a:t>ChangeDetector</a:t>
             </a:r>
           </a:p>
         </p:txBody>
@@ -5841,7 +5841,7 @@
                 <a:ea typeface="Arial"/>
                 <a:cs typeface="Arial"/>
               </a:rPr>
-              <a:t>Google Drive Adapter</a:t>
+              <a:t>GoogleDriveStorage</a:t>
             </a:r>
           </a:p>
         </p:txBody>
@@ -6015,7 +6015,7 @@
                 <a:ea typeface="Arial"/>
                 <a:cs typeface="Arial"/>
               </a:rPr>
-              <a:t>SQLite Repository</a:t>
+              <a:t>SQLite-репозиторії</a:t>
             </a:r>
           </a:p>
         </p:txBody>
@@ -7538,7 +7538,7 @@
                 <a:ea typeface="Arial"/>
                 <a:cs typeface="Arial"/>
               </a:rPr>
-              <a:t>Sync Coordinator</a:t>
+              <a:t>SyncCoordinator</a:t>
             </a:r>
           </a:p>
         </p:txBody>
@@ -9620,7 +9620,7 @@
                 <a:ea typeface="Arial"/>
                 <a:cs typeface="Arial"/>
               </a:rPr>
-              <a:t>account_id · email</a:t>
+              <a:t>id · email</a:t>
             </a:r>
           </a:p>
           <a:p xmlns:a="http://schemas.openxmlformats.org/drawingml/2006/main">
@@ -9794,7 +9794,7 @@
                 <a:ea typeface="Arial"/>
                 <a:cs typeface="Arial"/>
               </a:rPr>
-              <a:t>pair_id · local_path</a:t>
+              <a:t>id · account_id · local_path</a:t>
             </a:r>
           </a:p>
           <a:p xmlns:a="http://schemas.openxmlformats.org/drawingml/2006/main">
@@ -10142,7 +10142,7 @@
                 <a:ea typeface="Arial"/>
                 <a:cs typeface="Arial"/>
               </a:rPr>
-              <a:t>rule_id · pair_id</a:t>
+              <a:t>id · sync_pair_id</a:t>
             </a:r>
           </a:p>
           <a:p xmlns:a="http://schemas.openxmlformats.org/drawingml/2006/main">
@@ -10339,7 +10339,7 @@
                 <a:ea typeface="Arial"/>
                 <a:cs typeface="Arial"/>
               </a:rPr>
-              <a:t>хеш · час зміни</a:t>
+              <a:t>MD5-хеш · час зміни</a:t>
             </a:r>
           </a:p>
           <a:p xmlns:a="http://schemas.openxmlformats.org/drawingml/2006/main">
@@ -11625,7 +11625,7 @@
                 <a:ea typeface="Arial"/>
                 <a:cs typeface="Arial"/>
               </a:rPr>
-              <a:t>Макет інтерфейсу · демонстраційні дані</a:t>
+              <a:t/>
             </a:r>
           </a:p>
         </p:txBody>
@@ -11807,7 +11807,7 @@
                 <a:ea typeface="Arial"/>
                 <a:cs typeface="Arial"/>
               </a:rPr>
-              <a:t>Стан прикладу</a:t>
+              <a:t>Оновлено о 10:42</a:t>
             </a:r>
           </a:p>
         </p:txBody>
@@ -12469,7 +12469,7 @@
                 <a:ea typeface="Arial"/>
                 <a:cs typeface="Arial"/>
               </a:rPr>
-              <a:t>Останній запуск: приклад макета</a:t>
+              <a:t>Останній запуск: сьогодні, 10:42</a:t>
             </a:r>
           </a:p>
         </p:txBody>
@@ -13291,7 +13291,7 @@
                 <a:ea typeface="Arial"/>
                 <a:cs typeface="Arial"/>
               </a:rPr>
-              <a:t>Макет інтерфейсу · демонстраційні дані</a:t>
+              <a:t/>
             </a:r>
           </a:p>
         </p:txBody>
@@ -14092,7 +14092,7 @@
                 <a:ea typeface="Arial"/>
                 <a:cs typeface="Arial"/>
               </a:rPr>
-              <a:t>[значення]</a:t>
+              <a:t>5</a:t>
             </a:r>
           </a:p>
         </p:txBody>
@@ -14394,7 +14394,7 @@
                 <a:ea typeface="Arial"/>
                 <a:cs typeface="Arial"/>
               </a:rPr>
-              <a:t>Числове значення інтервалу залишено на узгодження команди.</a:t>
+              <a:t>Інтервал перевірки за замовчуванням — 5 хв (1–60).</a:t>
             </a:r>
           </a:p>
         </p:txBody>
@@ -15158,7 +15158,7 @@
                 <a:ea typeface="Arial"/>
                 <a:cs typeface="Arial"/>
               </a:rPr>
-              <a:t>Макет інтерфейсу · демонстраційні дані</a:t>
+              <a:t/>
             </a:r>
           </a:p>
         </p:txBody>
